--- a/presentations/11-c-capstone/11-c-capstone-lab.pptx
+++ b/presentations/11-c-capstone/11-c-capstone-lab.pptx
@@ -133,7 +133,7 @@
   <p:extLst>
     <p:ext uri="{521415D9-36F7-43E2-AB2F-B90AF26B5E84}">
       <p14:sectionLst xmlns:p14="http://schemas.microsoft.com/office/powerpoint/2010/main">
-        <p14:section name="Opening" id="{c53079ac-5b5d-cca7-b0ab-9ae1a4fbef4e}">
+        <p14:section name="Opening" id="{3d8d7c2e-ef52-bdcd-22af-25edb6bbf0be}">
           <p14:sldIdLst>
             <p14:sldId id="256"/>
             <p14:sldId id="257"/>
@@ -141,7 +141,7 @@
             <p14:sldId id="259"/>
           </p14:sldIdLst>
         </p14:section>
-        <p14:section name="Refactor" id="{d5796564-84b4-b9d8-7297-3597455dd3e6}">
+        <p14:section name="Refactor" id="{7577b87e-9c0c-a432-4bc6-fa9f01f8193d}">
           <p14:sldIdLst>
             <p14:sldId id="260"/>
             <p14:sldId id="261"/>
@@ -149,7 +149,7 @@
             <p14:sldId id="263"/>
           </p14:sldIdLst>
         </p14:section>
-        <p14:section name="Fixed point" id="{01f51377-a5c7-dfd7-32e8-e835804dfcf6}">
+        <p14:section name="Fixed point" id="{8b60cb01-77fd-c3c5-7319-3471a1ea4163}">
           <p14:sldIdLst>
             <p14:sldId id="264"/>
             <p14:sldId id="265"/>
@@ -159,7 +159,7 @@
             <p14:sldId id="269"/>
           </p14:sldIdLst>
         </p14:section>
-        <p14:section name="Lives and edges" id="{6107f705-4094-0238-b6dc-e417d9c129cd}">
+        <p14:section name="Lives and edges" id="{3ed5a34b-8127-3ab5-c6e5-95d89c43df73}">
           <p14:sldIdLst>
             <p14:sldId id="270"/>
             <p14:sldId id="271"/>
@@ -167,14 +167,14 @@
             <p14:sldId id="273"/>
           </p14:sldIdLst>
         </p14:section>
-        <p14:section name="Score" id="{3f73ee1e-d719-8b19-6e0a-3cccf5ee9537}">
+        <p14:section name="Score" id="{3a727737-7d94-51ec-940f-929e4798b000}">
           <p14:sldIdLst>
             <p14:sldId id="274"/>
             <p14:sldId id="275"/>
             <p14:sldId id="276"/>
           </p14:sldIdLst>
         </p14:section>
-        <p14:section name="Ship" id="{5d3062fb-d8a6-6a74-d95e-95ec9e381650}">
+        <p14:section name="Ship" id="{1073225d-e79e-18be-b8ee-e8fa59a013e2}">
           <p14:sldIdLst>
             <p14:sldId id="277"/>
             <p14:sldId id="278"/>
@@ -183,7 +183,7 @@
             <p14:sldId id="281"/>
           </p14:sldIdLst>
         </p14:section>
-        <p14:section name="Closing" id="{e3785262-f4d4-0a06-0c01-dd169a881c9f}">
+        <p14:section name="Closing" id="{cad23643-6c2c-fdf5-798a-ccee54a1a6e7}">
           <p14:sldIdLst>
             <p14:sldId id="282"/>
           </p14:sldIdLst>
@@ -5198,7 +5198,7 @@
               <a:buNone/>
             </a:pPr>
             <a:r>
-              <a:rPr lang="en-US" sz="1050" dirty="0">
+              <a:rPr lang="en-US" sz="1250" dirty="0">
                 <a:solidFill>
                   <a:srgbClr val="E6EDF2"/>
                 </a:solidFill>
@@ -5208,14 +5208,14 @@
               </a:rPr>
               <a:t>    ball_xq += ball_dxq;</a:t>
             </a:r>
-            <a:endParaRPr lang="en-US" sz="1050" dirty="0"/>
+            <a:endParaRPr lang="en-US" sz="1250" dirty="0"/>
           </a:p>
           <a:p>
             <a:pPr indent="0" marL="0">
               <a:buNone/>
             </a:pPr>
             <a:r>
-              <a:rPr lang="en-US" sz="1050" dirty="0">
+              <a:rPr lang="en-US" sz="1250" dirty="0">
                 <a:solidFill>
                   <a:srgbClr val="E6EDF2"/>
                 </a:solidFill>
@@ -5225,14 +5225,14 @@
               </a:rPr>
               <a:t>    ball_yq += ball_dyq;</a:t>
             </a:r>
-            <a:endParaRPr lang="en-US" sz="1050" dirty="0"/>
+            <a:endParaRPr lang="en-US" sz="1250" dirty="0"/>
           </a:p>
           <a:p>
             <a:pPr indent="0" marL="0">
               <a:buNone/>
             </a:pPr>
             <a:r>
-              <a:rPr lang="en-US" sz="1050" dirty="0">
+              <a:rPr lang="en-US" sz="1250" dirty="0">
                 <a:solidFill>
                   <a:srgbClr val="E6EDF2"/>
                 </a:solidFill>
@@ -5240,16 +5240,16 @@
                 <a:ea typeface="Courier New" pitchFamily="34" charset="-122"/>
                 <a:cs typeface="Courier New" pitchFamily="34" charset="-120"/>
               </a:rPr>
-              <a:t>    if (ball_xq &lt; 0 || ball_xq &gt; (PRG32_GAME_W - BALL_SIZE) * Q) { ball_dxq =</a:t>
-            </a:r>
-            <a:endParaRPr lang="en-US" sz="1050" dirty="0"/>
+              <a:t>    if (ball_xq &lt; 0 || ball_xq &gt; (PRG32_GAME_W - BALL_SIZE) * Q)</a:t>
+            </a:r>
+            <a:endParaRPr lang="en-US" sz="1250" dirty="0"/>
           </a:p>
           <a:p>
             <a:pPr indent="0" marL="0">
               <a:buNone/>
             </a:pPr>
             <a:r>
-              <a:rPr lang="en-US" sz="1050" dirty="0">
+              <a:rPr lang="en-US" sz="1250" dirty="0">
                 <a:solidFill>
                   <a:srgbClr val="E6EDF2"/>
                 </a:solidFill>
@@ -5257,16 +5257,16 @@
                 <a:ea typeface="Courier New" pitchFamily="34" charset="-122"/>
                 <a:cs typeface="Courier New" pitchFamily="34" charset="-120"/>
               </a:rPr>
-              <a:t>        -ball_dxq; }</a:t>
-            </a:r>
-            <a:endParaRPr lang="en-US" sz="1050" dirty="0"/>
+              <a:t>        { ball_dxq = -ball_dxq; }</a:t>
+            </a:r>
+            <a:endParaRPr lang="en-US" sz="1250" dirty="0"/>
           </a:p>
           <a:p>
             <a:pPr indent="0" marL="0">
               <a:buNone/>
             </a:pPr>
             <a:r>
-              <a:rPr lang="en-US" sz="1050" dirty="0">
+              <a:rPr lang="en-US" sz="1250" dirty="0">
                 <a:solidFill>
                   <a:srgbClr val="E6EDF2"/>
                 </a:solidFill>
@@ -5276,14 +5276,14 @@
               </a:rPr>
               <a:t>    if (ball_yq &lt; 0) { ball_dyq = -ball_dyq; }</a:t>
             </a:r>
-            <a:endParaRPr lang="en-US" sz="1050" dirty="0"/>
+            <a:endParaRPr lang="en-US" sz="1250" dirty="0"/>
           </a:p>
           <a:p>
             <a:pPr indent="0" marL="0">
               <a:buNone/>
             </a:pPr>
             <a:r>
-              <a:rPr lang="en-US" sz="1050" dirty="0">
+              <a:rPr lang="en-US" sz="1250" dirty="0">
                 <a:solidFill>
                   <a:srgbClr val="E6EDF2"/>
                 </a:solidFill>
@@ -5293,14 +5293,14 @@
               </a:rPr>
               <a:t>    if (ball_yq &gt; PRG32_GAME_H * Q) { refine_c_init(); }</a:t>
             </a:r>
-            <a:endParaRPr lang="en-US" sz="1050" dirty="0"/>
+            <a:endParaRPr lang="en-US" sz="1250" dirty="0"/>
           </a:p>
           <a:p>
             <a:pPr indent="0" marL="0">
               <a:buNone/>
             </a:pPr>
             <a:r>
-              <a:rPr lang="en-US" sz="1050" dirty="0">
+              <a:rPr lang="en-US" sz="1250" dirty="0">
                 <a:solidFill>
                   <a:srgbClr val="E6EDF2"/>
                 </a:solidFill>
@@ -5310,14 +5310,14 @@
               </a:rPr>
               <a:t>    if (ball_dyq &gt; 0 &amp;&amp;</a:t>
             </a:r>
-            <a:endParaRPr lang="en-US" sz="1050" dirty="0"/>
+            <a:endParaRPr lang="en-US" sz="1250" dirty="0"/>
           </a:p>
           <a:p>
             <a:pPr indent="0" marL="0">
               <a:buNone/>
             </a:pPr>
             <a:r>
-              <a:rPr lang="en-US" sz="1050" dirty="0">
+              <a:rPr lang="en-US" sz="1250" dirty="0">
                 <a:solidFill>
                   <a:srgbClr val="E6EDF2"/>
                 </a:solidFill>
@@ -5325,16 +5325,16 @@
                 <a:ea typeface="Courier New" pitchFamily="34" charset="-122"/>
                 <a:cs typeface="Courier New" pitchFamily="34" charset="-120"/>
               </a:rPr>
-              <a:t>        prg32_sprite_hitbox(ball_xq / Q, ball_yq / Q, BALL_SIZE, BALL_SIZE,</a:t>
-            </a:r>
-            <a:endParaRPr lang="en-US" sz="1050" dirty="0"/>
+              <a:t>        prg32_sprite_hitbox(ball_xq / Q, ball_yq / Q, BALL_SIZE,</a:t>
+            </a:r>
+            <a:endParaRPr lang="en-US" sz="1250" dirty="0"/>
           </a:p>
           <a:p>
             <a:pPr indent="0" marL="0">
               <a:buNone/>
             </a:pPr>
             <a:r>
-              <a:rPr lang="en-US" sz="1050" dirty="0">
+              <a:rPr lang="en-US" sz="1250" dirty="0">
                 <a:solidFill>
                   <a:srgbClr val="E6EDF2"/>
                 </a:solidFill>
@@ -5342,16 +5342,16 @@
                 <a:ea typeface="Courier New" pitchFamily="34" charset="-122"/>
                 <a:cs typeface="Courier New" pitchFamily="34" charset="-120"/>
               </a:rPr>
-              <a:t>                            paddle_x, PADDLE_Y, PADDLE_W, PADDLE_H)) {</a:t>
-            </a:r>
-            <a:endParaRPr lang="en-US" sz="1050" dirty="0"/>
+              <a:t>            BALL_SIZE,</a:t>
+            </a:r>
+            <a:endParaRPr lang="en-US" sz="1250" dirty="0"/>
           </a:p>
           <a:p>
             <a:pPr indent="0" marL="0">
               <a:buNone/>
             </a:pPr>
             <a:r>
-              <a:rPr lang="en-US" sz="1050" dirty="0">
+              <a:rPr lang="en-US" sz="1250" dirty="0">
                 <a:solidFill>
                   <a:srgbClr val="E6EDF2"/>
                 </a:solidFill>
@@ -5359,16 +5359,16 @@
                 <a:ea typeface="Courier New" pitchFamily="34" charset="-122"/>
                 <a:cs typeface="Courier New" pitchFamily="34" charset="-120"/>
               </a:rPr>
-              <a:t>        score += 1;</a:t>
-            </a:r>
-            <a:endParaRPr lang="en-US" sz="1050" dirty="0"/>
+              <a:t>                            paddle_x, PADDLE_Y, PADDLE_W,</a:t>
+            </a:r>
+            <a:endParaRPr lang="en-US" sz="1250" dirty="0"/>
           </a:p>
           <a:p>
             <a:pPr indent="0" marL="0">
               <a:buNone/>
             </a:pPr>
             <a:r>
-              <a:rPr lang="en-US" sz="1050" dirty="0">
+              <a:rPr lang="en-US" sz="1250" dirty="0">
                 <a:solidFill>
                   <a:srgbClr val="E6EDF2"/>
                 </a:solidFill>
@@ -5376,30 +5376,33 @@
                 <a:ea typeface="Courier New" pitchFamily="34" charset="-122"/>
                 <a:cs typeface="Courier New" pitchFamily="34" charset="-120"/>
               </a:rPr>
-              <a:t>        ball_dyq = -(ball_dyq * 21 / 20); </a:t>
-            </a:r>
+              <a:t>                                PADDLE_H)) {</a:t>
+            </a:r>
+            <a:endParaRPr lang="en-US" sz="1250" dirty="0"/>
+          </a:p>
+          <a:p>
             <a:pPr indent="0" marL="0">
               <a:buNone/>
             </a:pPr>
             <a:r>
-              <a:rPr lang="en-US" sz="1050" dirty="0">
-                <a:solidFill>
-                  <a:srgbClr val="8FB3A0"/>
+              <a:rPr lang="en-US" sz="1250" dirty="0">
+                <a:solidFill>
+                  <a:srgbClr val="E6EDF2"/>
                 </a:solidFill>
                 <a:latin typeface="Courier New" pitchFamily="34" charset="0"/>
                 <a:ea typeface="Courier New" pitchFamily="34" charset="-122"/>
                 <a:cs typeface="Courier New" pitchFamily="34" charset="-120"/>
               </a:rPr>
-              <a:t>/* up, and 5% faster */</a:t>
-            </a:r>
-            <a:endParaRPr lang="en-US" sz="1050" dirty="0"/>
+              <a:t>        score += 1;</a:t>
+            </a:r>
+            <a:endParaRPr lang="en-US" sz="1250" dirty="0"/>
           </a:p>
           <a:p>
             <a:pPr indent="0" marL="0">
               <a:buNone/>
             </a:pPr>
             <a:r>
-              <a:rPr lang="en-US" sz="1050" dirty="0">
+              <a:rPr lang="en-US" sz="1250" dirty="0">
                 <a:solidFill>
                   <a:srgbClr val="E6EDF2"/>
                 </a:solidFill>
@@ -5407,26 +5410,57 @@
                 <a:ea typeface="Courier New" pitchFamily="34" charset="-122"/>
                 <a:cs typeface="Courier New" pitchFamily="34" charset="-120"/>
               </a:rPr>
-              <a:t>        if (ball_dyq &lt; -4 * Q) { ball_dyq = -4 * Q; }</a:t>
-            </a:r>
-            <a:endParaRPr lang="en-US" sz="1050" dirty="0"/>
-          </a:p>
-          <a:p>
+              <a:t>        ball_dyq = -(ball_dyq * 21 / 20); </a:t>
+            </a:r>
             <a:pPr indent="0" marL="0">
               <a:buNone/>
             </a:pPr>
             <a:r>
-              <a:rPr lang="en-US" sz="1050" dirty="0">
-                <a:solidFill>
-                  <a:srgbClr val="E6EDF2"/>
+              <a:rPr lang="en-US" sz="1250" dirty="0">
+                <a:solidFill>
+                  <a:srgbClr val="8FB3A0"/>
                 </a:solidFill>
                 <a:latin typeface="Courier New" pitchFamily="34" charset="0"/>
                 <a:ea typeface="Courier New" pitchFamily="34" charset="-122"/>
                 <a:cs typeface="Courier New" pitchFamily="34" charset="-120"/>
               </a:rPr>
+              <a:t>/* up, and 5% faster */</a:t>
+            </a:r>
+            <a:endParaRPr lang="en-US" sz="1250" dirty="0"/>
+          </a:p>
+          <a:p>
+            <a:pPr indent="0" marL="0">
+              <a:buNone/>
+            </a:pPr>
+            <a:r>
+              <a:rPr lang="en-US" sz="1250" dirty="0">
+                <a:solidFill>
+                  <a:srgbClr val="E6EDF2"/>
+                </a:solidFill>
+                <a:latin typeface="Courier New" pitchFamily="34" charset="0"/>
+                <a:ea typeface="Courier New" pitchFamily="34" charset="-122"/>
+                <a:cs typeface="Courier New" pitchFamily="34" charset="-120"/>
+              </a:rPr>
+              <a:t>        if (ball_dyq &lt; -4 * Q) { ball_dyq = -4 * Q; }</a:t>
+            </a:r>
+            <a:endParaRPr lang="en-US" sz="1250" dirty="0"/>
+          </a:p>
+          <a:p>
+            <a:pPr indent="0" marL="0">
+              <a:buNone/>
+            </a:pPr>
+            <a:r>
+              <a:rPr lang="en-US" sz="1250" dirty="0">
+                <a:solidFill>
+                  <a:srgbClr val="E6EDF2"/>
+                </a:solidFill>
+                <a:latin typeface="Courier New" pitchFamily="34" charset="0"/>
+                <a:ea typeface="Courier New" pitchFamily="34" charset="-122"/>
+                <a:cs typeface="Courier New" pitchFamily="34" charset="-120"/>
+              </a:rPr>
               <a:t>    }</a:t>
             </a:r>
-            <a:endParaRPr lang="en-US" sz="1050" dirty="0"/>
+            <a:endParaRPr lang="en-US" sz="1250" dirty="0"/>
           </a:p>
         </p:txBody>
       </p:sp>
@@ -7788,7 +7822,7 @@
               <a:buNone/>
             </a:pPr>
             <a:r>
-              <a:rPr lang="en-US" sz="1100" dirty="0">
+              <a:rPr lang="en-US" sz="1300" dirty="0">
                 <a:solidFill>
                   <a:srgbClr val="E6EDF2"/>
                 </a:solidFill>
@@ -7802,7 +7836,7 @@
               <a:buNone/>
             </a:pPr>
             <a:r>
-              <a:rPr lang="en-US" sz="1100" dirty="0">
+              <a:rPr lang="en-US" sz="1300" dirty="0">
                 <a:solidFill>
                   <a:srgbClr val="8FB3A0"/>
                 </a:solidFill>
@@ -7810,16 +7844,16 @@
                 <a:ea typeface="Courier New" pitchFamily="34" charset="-122"/>
                 <a:cs typeface="Courier New" pitchFamily="34" charset="-120"/>
               </a:rPr>
-              <a:t>/* edges, not levels */</a:t>
-            </a:r>
-            <a:endParaRPr lang="en-US" sz="1100" dirty="0"/>
+              <a:t>/* edges, not</a:t>
+            </a:r>
+            <a:endParaRPr lang="en-US" sz="1300" dirty="0"/>
           </a:p>
           <a:p>
             <a:pPr indent="0" marL="0">
               <a:buNone/>
             </a:pPr>
             <a:r>
-              <a:rPr lang="en-US" sz="1100" dirty="0">
+              <a:rPr lang="en-US" sz="1300" dirty="0">
                 <a:solidFill>
                   <a:srgbClr val="E6EDF2"/>
                 </a:solidFill>
@@ -7827,16 +7861,16 @@
                 <a:ea typeface="Courier New" pitchFamily="34" charset="-122"/>
                 <a:cs typeface="Courier New" pitchFamily="34" charset="-120"/>
               </a:rPr>
-              <a:t>    previous_input = input;</a:t>
-            </a:r>
-            <a:endParaRPr lang="en-US" sz="1100" dirty="0"/>
+              <a:t>        levels */</a:t>
+            </a:r>
+            <a:endParaRPr lang="en-US" sz="1300" dirty="0"/>
           </a:p>
           <a:p>
             <a:pPr indent="0" marL="0">
               <a:buNone/>
             </a:pPr>
             <a:r>
-              <a:rPr lang="en-US" sz="1100" dirty="0">
+              <a:rPr lang="en-US" sz="1300" dirty="0">
                 <a:solidFill>
                   <a:srgbClr val="E6EDF2"/>
                 </a:solidFill>
@@ -7844,16 +7878,16 @@
                 <a:ea typeface="Courier New" pitchFamily="34" charset="-122"/>
                 <a:cs typeface="Courier New" pitchFamily="34" charset="-120"/>
               </a:rPr>
-              <a:t> </a:t>
-            </a:r>
-            <a:endParaRPr lang="en-US" sz="1100" dirty="0"/>
+              <a:t>    previous_input = input;</a:t>
+            </a:r>
+            <a:endParaRPr lang="en-US" sz="1300" dirty="0"/>
           </a:p>
           <a:p>
             <a:pPr indent="0" marL="0">
               <a:buNone/>
             </a:pPr>
             <a:r>
-              <a:rPr lang="en-US" sz="1100" dirty="0">
+              <a:rPr lang="en-US" sz="1300" dirty="0">
                 <a:solidFill>
                   <a:srgbClr val="E6EDF2"/>
                 </a:solidFill>
@@ -7861,16 +7895,16 @@
                 <a:ea typeface="Courier New" pitchFamily="34" charset="-122"/>
                 <a:cs typeface="Courier New" pitchFamily="34" charset="-120"/>
               </a:rPr>
-              <a:t>    if (game_over) {</a:t>
-            </a:r>
-            <a:endParaRPr lang="en-US" sz="1100" dirty="0"/>
+              <a:t> </a:t>
+            </a:r>
+            <a:endParaRPr lang="en-US" sz="1300" dirty="0"/>
           </a:p>
           <a:p>
             <a:pPr indent="0" marL="0">
               <a:buNone/>
             </a:pPr>
             <a:r>
-              <a:rPr lang="en-US" sz="1100" dirty="0">
+              <a:rPr lang="en-US" sz="1300" dirty="0">
                 <a:solidFill>
                   <a:srgbClr val="E6EDF2"/>
                 </a:solidFill>
@@ -7878,16 +7912,16 @@
                 <a:ea typeface="Courier New" pitchFamily="34" charset="-122"/>
                 <a:cs typeface="Courier New" pitchFamily="34" charset="-120"/>
               </a:rPr>
-              <a:t>        if (pressed &amp; PRG32_BTN_A) {</a:t>
-            </a:r>
-            <a:endParaRPr lang="en-US" sz="1100" dirty="0"/>
+              <a:t>    if (game_over) {</a:t>
+            </a:r>
+            <a:endParaRPr lang="en-US" sz="1300" dirty="0"/>
           </a:p>
           <a:p>
             <a:pPr indent="0" marL="0">
               <a:buNone/>
             </a:pPr>
             <a:r>
-              <a:rPr lang="en-US" sz="1100" dirty="0">
+              <a:rPr lang="en-US" sz="1300" dirty="0">
                 <a:solidFill>
                   <a:srgbClr val="E6EDF2"/>
                 </a:solidFill>
@@ -7895,16 +7929,16 @@
                 <a:ea typeface="Courier New" pitchFamily="34" charset="-122"/>
                 <a:cs typeface="Courier New" pitchFamily="34" charset="-120"/>
               </a:rPr>
-              <a:t>            refine_c_init();</a:t>
-            </a:r>
-            <a:endParaRPr lang="en-US" sz="1100" dirty="0"/>
+              <a:t>        if (pressed &amp; PRG32_BTN_A) {</a:t>
+            </a:r>
+            <a:endParaRPr lang="en-US" sz="1300" dirty="0"/>
           </a:p>
           <a:p>
             <a:pPr indent="0" marL="0">
               <a:buNone/>
             </a:pPr>
             <a:r>
-              <a:rPr lang="en-US" sz="1100" dirty="0">
+              <a:rPr lang="en-US" sz="1300" dirty="0">
                 <a:solidFill>
                   <a:srgbClr val="E6EDF2"/>
                 </a:solidFill>
@@ -7912,16 +7946,16 @@
                 <a:ea typeface="Courier New" pitchFamily="34" charset="-122"/>
                 <a:cs typeface="Courier New" pitchFamily="34" charset="-120"/>
               </a:rPr>
-              <a:t>        }</a:t>
-            </a:r>
-            <a:endParaRPr lang="en-US" sz="1100" dirty="0"/>
+              <a:t>            refine_c_init();</a:t>
+            </a:r>
+            <a:endParaRPr lang="en-US" sz="1300" dirty="0"/>
           </a:p>
           <a:p>
             <a:pPr indent="0" marL="0">
               <a:buNone/>
             </a:pPr>
             <a:r>
-              <a:rPr lang="en-US" sz="1100" dirty="0">
+              <a:rPr lang="en-US" sz="1300" dirty="0">
                 <a:solidFill>
                   <a:srgbClr val="E6EDF2"/>
                 </a:solidFill>
@@ -7929,16 +7963,16 @@
                 <a:ea typeface="Courier New" pitchFamily="34" charset="-122"/>
                 <a:cs typeface="Courier New" pitchFamily="34" charset="-120"/>
               </a:rPr>
-              <a:t>        return;</a:t>
-            </a:r>
-            <a:endParaRPr lang="en-US" sz="1100" dirty="0"/>
+              <a:t>        }</a:t>
+            </a:r>
+            <a:endParaRPr lang="en-US" sz="1300" dirty="0"/>
           </a:p>
           <a:p>
             <a:pPr indent="0" marL="0">
               <a:buNone/>
             </a:pPr>
             <a:r>
-              <a:rPr lang="en-US" sz="1100" dirty="0">
+              <a:rPr lang="en-US" sz="1300" dirty="0">
                 <a:solidFill>
                   <a:srgbClr val="E6EDF2"/>
                 </a:solidFill>
@@ -7946,9 +7980,26 @@
                 <a:ea typeface="Courier New" pitchFamily="34" charset="-122"/>
                 <a:cs typeface="Courier New" pitchFamily="34" charset="-120"/>
               </a:rPr>
+              <a:t>        return;</a:t>
+            </a:r>
+            <a:endParaRPr lang="en-US" sz="1300" dirty="0"/>
+          </a:p>
+          <a:p>
+            <a:pPr indent="0" marL="0">
+              <a:buNone/>
+            </a:pPr>
+            <a:r>
+              <a:rPr lang="en-US" sz="1300" dirty="0">
+                <a:solidFill>
+                  <a:srgbClr val="E6EDF2"/>
+                </a:solidFill>
+                <a:latin typeface="Courier New" pitchFamily="34" charset="0"/>
+                <a:ea typeface="Courier New" pitchFamily="34" charset="-122"/>
+                <a:cs typeface="Courier New" pitchFamily="34" charset="-120"/>
+              </a:rPr>
               <a:t>    }</a:t>
             </a:r>
-            <a:endParaRPr lang="en-US" sz="1100" dirty="0"/>
+            <a:endParaRPr lang="en-US" sz="1300" dirty="0"/>
           </a:p>
         </p:txBody>
       </p:sp>
@@ -10554,7 +10605,7 @@
               <a:buNone/>
             </a:pPr>
             <a:r>
-              <a:rPr lang="en-US" sz="1000" dirty="0">
+              <a:rPr lang="en-US" sz="1350" dirty="0">
                 <a:solidFill>
                   <a:srgbClr val="E6EDF2"/>
                 </a:solidFill>
@@ -10564,14 +10615,14 @@
               </a:rPr>
               <a:t>        if (lives == 0) {</a:t>
             </a:r>
-            <a:endParaRPr lang="en-US" sz="1000" dirty="0"/>
+            <a:endParaRPr lang="en-US" sz="1350" dirty="0"/>
           </a:p>
           <a:p>
             <a:pPr indent="0" marL="0">
               <a:buNone/>
             </a:pPr>
             <a:r>
-              <a:rPr lang="en-US" sz="1000" dirty="0">
+              <a:rPr lang="en-US" sz="1350" dirty="0">
                 <a:solidFill>
                   <a:srgbClr val="E6EDF2"/>
                 </a:solidFill>
@@ -10581,14 +10632,14 @@
               </a:rPr>
               <a:t>            game_over = 1;</a:t>
             </a:r>
-            <a:endParaRPr lang="en-US" sz="1000" dirty="0"/>
+            <a:endParaRPr lang="en-US" sz="1350" dirty="0"/>
           </a:p>
           <a:p>
             <a:pPr indent="0" marL="0">
               <a:buNone/>
             </a:pPr>
             <a:r>
-              <a:rPr lang="en-US" sz="1000" dirty="0">
+              <a:rPr lang="en-US" sz="1350" dirty="0">
                 <a:solidFill>
                   <a:srgbClr val="E6EDF2"/>
                 </a:solidFill>
@@ -10596,16 +10647,16 @@
                 <a:ea typeface="Courier New" pitchFamily="34" charset="-122"/>
                 <a:cs typeface="Courier New" pitchFamily="34" charset="-120"/>
               </a:rPr>
-              <a:t>            prg32_score_submit_current_player("refine-pong", (uint32_t)score);</a:t>
-            </a:r>
-            <a:endParaRPr lang="en-US" sz="1000" dirty="0"/>
+              <a:t>            prg32_score_submit_current_player("refine-pong",</a:t>
+            </a:r>
+            <a:endParaRPr lang="en-US" sz="1350" dirty="0"/>
           </a:p>
           <a:p>
             <a:pPr indent="0" marL="0">
               <a:buNone/>
             </a:pPr>
             <a:r>
-              <a:rPr lang="en-US" sz="1000" dirty="0">
+              <a:rPr lang="en-US" sz="1350" dirty="0">
                 <a:solidFill>
                   <a:srgbClr val="E6EDF2"/>
                 </a:solidFill>
@@ -10613,9 +10664,26 @@
                 <a:ea typeface="Courier New" pitchFamily="34" charset="-122"/>
                 <a:cs typeface="Courier New" pitchFamily="34" charset="-120"/>
               </a:rPr>
+              <a:t>                (uint32_t)score);</a:t>
+            </a:r>
+            <a:endParaRPr lang="en-US" sz="1350" dirty="0"/>
+          </a:p>
+          <a:p>
+            <a:pPr indent="0" marL="0">
+              <a:buNone/>
+            </a:pPr>
+            <a:r>
+              <a:rPr lang="en-US" sz="1350" dirty="0">
+                <a:solidFill>
+                  <a:srgbClr val="E6EDF2"/>
+                </a:solidFill>
+                <a:latin typeface="Courier New" pitchFamily="34" charset="0"/>
+                <a:ea typeface="Courier New" pitchFamily="34" charset="-122"/>
+                <a:cs typeface="Courier New" pitchFamily="34" charset="-120"/>
+              </a:rPr>
               <a:t>        }</a:t>
             </a:r>
-            <a:endParaRPr lang="en-US" sz="1000" dirty="0"/>
+            <a:endParaRPr lang="en-US" sz="1350" dirty="0"/>
           </a:p>
         </p:txBody>
       </p:sp>
